--- a/samples/sample.pptx
+++ b/samples/sample.pptx
@@ -1,4 +1,22 @@
 
 <file path=ppt/presentation.xml><?xml version="1.0" encoding="utf-8"?>
 <p:presentation xmlns:p="http://schemas.openxmlformats.org/presentationml/2006/main"/>
+</file>
+
+<file path=ppt/slides/slide1.xml><?xml version="1.0" encoding="utf-8"?>
+<p:sld xmlns:p="http://schemas.openxmlformats.org/presentationml/2006/main" xmlns:a="http://schemas.openxmlformats.org/drawingml/2006/main">
+  <p:cSld>
+    <p:spTree>
+      <p:sp>
+        <p:txBody>
+          <a:p>
+            <a:r>
+              <a:t>Project kickoff. Visit http://malware.example.com/payload.bin (203.0.113.10).</a:t>
+            </a:r>
+          </a:p>
+        </p:txBody>
+      </p:sp>
+    </p:spTree>
+  </p:cSld>
+</p:sld>
 </file>
--- a/samples/sample.pptx
+++ b/samples/sample.pptx
@@ -1,17 +1,104 @@
 
 <file path=ppt/presentation.xml><?xml version="1.0" encoding="utf-8"?>
-<p:presentation xmlns:p="http://schemas.openxmlformats.org/presentationml/2006/main"/>
+<p:presentation xmlns:p="http://schemas.openxmlformats.org/presentationml/2006/main" xmlns:a="http://schemas.openxmlformats.org/drawingml/2006/main" xmlns:r="http://schemas.openxmlformats.org/officeDocument/2006/relationships">
+  <p:sldIdLst>
+    <p:sldId id="256" r:id="rId11"/>
+    <p:sldId id="257" r:id="rId12"/>
+  </p:sldIdLst>
+  <p:sldSz cx="12192000" cy="6858000"/>
+  <p:notesSz cx="6858000" cy="9144000"/>
+</p:presentation>
 </file>
 
 <file path=ppt/slides/slide1.xml><?xml version="1.0" encoding="utf-8"?>
-<p:sld xmlns:p="http://schemas.openxmlformats.org/presentationml/2006/main" xmlns:a="http://schemas.openxmlformats.org/drawingml/2006/main">
+<p:sld xmlns:p="http://schemas.openxmlformats.org/presentationml/2006/main" xmlns:a="http://schemas.openxmlformats.org/drawingml/2006/main" xmlns:r="http://schemas.openxmlformats.org/officeDocument/2006/relationships">
   <p:cSld>
     <p:spTree>
+      <p:nvGrpSpPr>
+        <p:cNvPr id="1" name=""/>
+        <p:cNvGrpSpPr/>
+        <p:nvPr/>
+      </p:nvGrpSpPr>
+      <p:grpSpPr/>
       <p:sp>
+        <p:nvSpPr>
+          <p:cNvPr id="2" name="Contenido"/>
+          <p:cNvSpPr/>
+          <p:nvPr/>
+        </p:nvSpPr>
+        <p:spPr/>
         <p:txBody>
+          <a:bodyPr/>
+          <a:lstStyle/>
           <a:p>
             <a:r>
-              <a:t>Project kickoff. Visit http://malware.example.com/payload.bin (203.0.113.10).</a:t>
+              <a:rPr lang="es-ES" sz="3200" b="1"/>
+              <a:t>Nuevo procedimiento de pago a proveedores</a:t>
+            </a:r>
+          </a:p>
+          <a:p>
+            <a:r>
+              <a:rPr lang="es-ES"/>
+              <a:t>A partir del 15/10/2026 Suministros Iberia S.L. cambia su cuenta de abono.</a:t>
+            </a:r>
+          </a:p>
+          <a:p>
+            <a:r>
+              <a:rPr lang="es-ES"/>
+              <a:t>Actualice los datos bancarios en el portal antes del cierre mensual.</a:t>
+            </a:r>
+          </a:p>
+          <a:p>
+            <a:r>
+              <a:rPr lang="es-ES">
+                <a:hlinkClick r:id="rIdL1"/>
+              </a:rPr>
+              <a:t>Acceder al portal de proveedores</a:t>
+            </a:r>
+          </a:p>
+        </p:txBody>
+      </p:sp>
+    </p:spTree>
+  </p:cSld>
+</p:sld>
+</file>
+
+<file path=ppt/slides/slide2.xml><?xml version="1.0" encoding="utf-8"?>
+<p:sld xmlns:p="http://schemas.openxmlformats.org/presentationml/2006/main" xmlns:a="http://schemas.openxmlformats.org/drawingml/2006/main" xmlns:r="http://schemas.openxmlformats.org/officeDocument/2006/relationships">
+  <p:cSld>
+    <p:spTree>
+      <p:nvGrpSpPr>
+        <p:cNvPr id="1" name=""/>
+        <p:cNvGrpSpPr/>
+        <p:nvPr/>
+      </p:nvGrpSpPr>
+      <p:grpSpPr/>
+      <p:sp>
+        <p:nvSpPr>
+          <p:cNvPr id="2" name="Contenido"/>
+          <p:cNvSpPr/>
+          <p:nvPr/>
+        </p:nvSpPr>
+        <p:spPr/>
+        <p:txBody>
+          <a:bodyPr/>
+          <a:lstStyle/>
+          <a:p>
+            <a:r>
+              <a:rPr lang="es-ES" sz="3200" b="1"/>
+              <a:t>Calendario de cierre</a:t>
+            </a:r>
+          </a:p>
+          <a:p>
+            <a:r>
+              <a:rPr lang="es-ES"/>
+              <a:t>Semana 42: conciliación</a:t>
+            </a:r>
+          </a:p>
+          <a:p>
+            <a:r>
+              <a:rPr lang="es-ES"/>
+              <a:t>Semana 43: pagos</a:t>
             </a:r>
           </a:p>
         </p:txBody>
